--- a/m4/diapositivos/sessao-07-m4-f07.pptx
+++ b/m4/diapositivos/sessao-07-m4-f07.pptx
@@ -2598,7 +2598,35 @@
                 <a:ea typeface="Arial" pitchFamily="34" charset="-122"/>
                 <a:cs typeface="Arial" pitchFamily="34" charset="-120"/>
               </a:rPr>
-              <a:t>Almeida Garrett, Frei Luís de Sousa (1844), ortografia atualizada.</a:t>
+              <a:t>Almeida Garrett, </a:t>
+            </a:r>
+            <a:pPr indent="0" marL="0">
+              <a:buNone/>
+            </a:pPr>
+            <a:r>
+              <a:rPr lang="en-US" sz="1200" i="1" dirty="0">
+                <a:solidFill>
+                  <a:srgbClr val="A9A79F"/>
+                </a:solidFill>
+                <a:latin typeface="Arial" pitchFamily="34" charset="0"/>
+                <a:ea typeface="Arial" pitchFamily="34" charset="-122"/>
+                <a:cs typeface="Arial" pitchFamily="34" charset="-120"/>
+              </a:rPr>
+              <a:t>Frei Luís de Sousa</a:t>
+            </a:r>
+            <a:pPr indent="0" marL="0">
+              <a:buNone/>
+            </a:pPr>
+            <a:r>
+              <a:rPr lang="en-US" sz="1200" dirty="0">
+                <a:solidFill>
+                  <a:srgbClr val="A9A79F"/>
+                </a:solidFill>
+                <a:latin typeface="Arial" pitchFamily="34" charset="0"/>
+                <a:ea typeface="Arial" pitchFamily="34" charset="-122"/>
+                <a:cs typeface="Arial" pitchFamily="34" charset="-120"/>
+              </a:rPr>
+              <a:t> (1844), ortografia atualizada.</a:t>
             </a:r>
             <a:endParaRPr lang="en-US" sz="1200" dirty="0"/>
           </a:p>
@@ -3018,7 +3046,35 @@
                 <a:ea typeface="Arial" pitchFamily="34" charset="-122"/>
                 <a:cs typeface="Arial" pitchFamily="34" charset="-120"/>
               </a:rPr>
-              <a:t>Almeida Garrett, Frei Luís de Sousa (1844), ortografia atualizada.</a:t>
+              <a:t>Almeida Garrett, </a:t>
+            </a:r>
+            <a:pPr indent="0" marL="0">
+              <a:buNone/>
+            </a:pPr>
+            <a:r>
+              <a:rPr lang="en-US" sz="1200" i="1" dirty="0">
+                <a:solidFill>
+                  <a:srgbClr val="A9A79F"/>
+                </a:solidFill>
+                <a:latin typeface="Arial" pitchFamily="34" charset="0"/>
+                <a:ea typeface="Arial" pitchFamily="34" charset="-122"/>
+                <a:cs typeface="Arial" pitchFamily="34" charset="-120"/>
+              </a:rPr>
+              <a:t>Frei Luís de Sousa</a:t>
+            </a:r>
+            <a:pPr indent="0" marL="0">
+              <a:buNone/>
+            </a:pPr>
+            <a:r>
+              <a:rPr lang="en-US" sz="1200" dirty="0">
+                <a:solidFill>
+                  <a:srgbClr val="A9A79F"/>
+                </a:solidFill>
+                <a:latin typeface="Arial" pitchFamily="34" charset="0"/>
+                <a:ea typeface="Arial" pitchFamily="34" charset="-122"/>
+                <a:cs typeface="Arial" pitchFamily="34" charset="-120"/>
+              </a:rPr>
+              <a:t> (1844), ortografia atualizada.</a:t>
             </a:r>
             <a:endParaRPr lang="en-US" sz="1200" dirty="0"/>
           </a:p>
@@ -3309,7 +3365,7 @@
         <p:spPr>
           <a:xfrm>
             <a:off x="1005840" y="2286000"/>
-            <a:ext cx="0" cy="2788412"/>
+            <a:ext cx="0" cy="3129280"/>
           </a:xfrm>
           <a:prstGeom prst="line">
             <a:avLst/>
@@ -3396,7 +3452,7 @@
         <p:spPr>
           <a:xfrm>
             <a:off x="1417320" y="2112264"/>
-            <a:ext cx="9174175" cy="1564640"/>
+            <a:ext cx="9174175" cy="1905508"/>
           </a:xfrm>
           <a:prstGeom prst="rect">
             <a:avLst/>
@@ -3417,6 +3473,23 @@
               <a:buNone/>
             </a:pPr>
             <a:r>
+              <a:rPr lang="en-US" sz="2200" i="1" dirty="0">
+                <a:solidFill>
+                  <a:srgbClr val="F2F0EA"/>
+                </a:solidFill>
+                <a:latin typeface="Arial" pitchFamily="34" charset="0"/>
+                <a:ea typeface="Arial" pitchFamily="34" charset="-122"/>
+                <a:cs typeface="Arial" pitchFamily="34" charset="-120"/>
+              </a:rPr>
+              <a:t>Frei Luís de Sousa</a:t>
+            </a:r>
+            <a:pPr indent="0" marL="0">
+              <a:lnSpc>
+                <a:spcPct val="105000"/>
+              </a:lnSpc>
+              <a:buNone/>
+            </a:pPr>
+            <a:r>
               <a:rPr lang="en-US" sz="2200" dirty="0">
                 <a:solidFill>
                   <a:srgbClr val="F2F0EA"/>
@@ -3425,7 +3498,7 @@
                 <a:ea typeface="Arial" pitchFamily="34" charset="-122"/>
                 <a:cs typeface="Arial" pitchFamily="34" charset="-120"/>
               </a:rPr>
-              <a:t>Frei Luís de Sousa, de Almeida Garrett (estreia em 1843, publicação em 1844), é um drama em três atos; Madalena casou com Manuel de Sousa Coutinho depois de o primeiro marido, D. João de Portugal, desaparecer em Alcácer Quibir.</a:t>
+              <a:t>, de Almeida Garrett (estreia em 1843, publicação em 1844), é um drama em três atos; Madalena casou com Manuel de Sousa Coutinho depois de o primeiro marido, D. João de Portugal, desaparecer em Alcácer Quibir.</a:t>
             </a:r>
             <a:endParaRPr lang="en-US" sz="2200" dirty="0"/>
           </a:p>
@@ -3439,7 +3512,7 @@
         </p:nvSpPr>
         <p:spPr>
           <a:xfrm>
-            <a:off x="822960" y="3667760"/>
+            <a:off x="822960" y="4008628"/>
             <a:ext cx="365760" cy="365760"/>
           </a:xfrm>
           <a:prstGeom prst="ellipse">
@@ -3464,7 +3537,7 @@
         </p:nvSpPr>
         <p:spPr>
           <a:xfrm>
-            <a:off x="822960" y="3667760"/>
+            <a:off x="822960" y="4008628"/>
             <a:ext cx="365760" cy="365760"/>
           </a:xfrm>
           <a:prstGeom prst="rect">
@@ -3503,7 +3576,7 @@
         </p:nvSpPr>
         <p:spPr>
           <a:xfrm>
-            <a:off x="1417320" y="3676904"/>
+            <a:off x="1417320" y="4017772"/>
             <a:ext cx="9174175" cy="1223772"/>
           </a:xfrm>
           <a:prstGeom prst="rect">
@@ -3547,7 +3620,7 @@
         </p:nvSpPr>
         <p:spPr>
           <a:xfrm>
-            <a:off x="822960" y="4891532"/>
+            <a:off x="822960" y="5232400"/>
             <a:ext cx="365760" cy="365760"/>
           </a:xfrm>
           <a:prstGeom prst="ellipse">
@@ -3572,7 +3645,7 @@
         </p:nvSpPr>
         <p:spPr>
           <a:xfrm>
-            <a:off x="822960" y="4891532"/>
+            <a:off x="822960" y="5232400"/>
             <a:ext cx="365760" cy="365760"/>
           </a:xfrm>
           <a:prstGeom prst="rect">
@@ -3611,7 +3684,7 @@
         </p:nvSpPr>
         <p:spPr>
           <a:xfrm>
-            <a:off x="1417320" y="4900676"/>
+            <a:off x="1417320" y="5241544"/>
             <a:ext cx="9174175" cy="882904"/>
           </a:xfrm>
           <a:prstGeom prst="rect">
@@ -3953,7 +4026,7 @@
               <a:buNone/>
             </a:pPr>
             <a:r>
-              <a:rPr lang="en-US" sz="2300" dirty="0">
+              <a:rPr lang="en-US" sz="2300" b="1" dirty="0">
                 <a:solidFill>
                   <a:srgbClr val="F2F0EA"/>
                 </a:solidFill>
@@ -3961,7 +4034,24 @@
                 <a:ea typeface="Georgia" pitchFamily="34" charset="-122"/>
                 <a:cs typeface="Georgia" pitchFamily="34" charset="-120"/>
               </a:rPr>
-              <a:t>Frei Luís de Sousa, de Almeida Garrett, estreou em 1843 e foi publicado em 1844. É um drama em três atos. D. Madalena de Vilhena casou com Manuel de Sousa Coutinho depois de o primeiro marido, D. João de Portugal, ter desaparecido na batalha de Alcácer Quibir. Vivem com a filha, Maria, e com o velho escudeiro Telmo. No fim do ato I, os governadores do reino (ao serviço de Castela) querem instalar-se no palácio de Manuel.</a:t>
+              <a:t>Frei Luís de Sousa</a:t>
+            </a:r>
+            <a:pPr indent="0" marL="0">
+              <a:lnSpc>
+                <a:spcPct val="120000"/>
+              </a:lnSpc>
+              <a:buNone/>
+            </a:pPr>
+            <a:r>
+              <a:rPr lang="en-US" sz="2300" dirty="0">
+                <a:solidFill>
+                  <a:srgbClr val="F2F0EA"/>
+                </a:solidFill>
+                <a:latin typeface="Georgia" pitchFamily="34" charset="0"/>
+                <a:ea typeface="Georgia" pitchFamily="34" charset="-122"/>
+                <a:cs typeface="Georgia" pitchFamily="34" charset="-120"/>
+              </a:rPr>
+              <a:t>, de Almeida Garrett, estreou em 1843 e foi publicado em 1844. É um drama em três atos. D. Madalena de Vilhena casou com Manuel de Sousa Coutinho depois de o primeiro marido, D. João de Portugal, ter desaparecido na batalha de Alcácer Quibir. Vivem com a filha, Maria, e com o velho escudeiro Telmo. No fim do ato I, os governadores do reino (ao serviço de Castela) querem instalar-se no palácio de Manuel.</a:t>
             </a:r>
             <a:endParaRPr lang="en-US" sz="2300" dirty="0"/>
           </a:p>
